--- a/week_06/MCTS.pptx
+++ b/week_06/MCTS.pptx
@@ -3974,8 +3974,8 @@
         </p:blipFill>
         <p:spPr>
           <a:xfrm>
-            <a:off x="647700" y="1584325"/>
-            <a:ext cx="5546090" cy="3481070"/>
+            <a:off x="3131185" y="400050"/>
+            <a:ext cx="8032115" cy="5041265"/>
           </a:xfrm>
           <a:prstGeom prst="rect">
             <a:avLst/>
